--- a/examples/recreations/18_Dropbox_Poverty_Awareness__Display Board Titles Headers/out_mat2ppt.pptx
+++ b/examples/recreations/18_Dropbox_Poverty_Awareness__Display Board Titles Headers/out_mat2ppt.pptx
@@ -1,21 +1,24 @@
 
 <file path=ppt/presentation.xml><?xml version="1.0" encoding="utf-8"?>
-<p:presentation xmlns:a="http://schemas.openxmlformats.org/drawingml/2006/main" xmlns:r="http://schemas.openxmlformats.org/officeDocument/2006/relationships" xmlns:p="http://schemas.openxmlformats.org/presentationml/2006/main" saveSubsetFonts="1" autoCompressPictures="0">
+<p:presentation xmlns:a="http://schemas.openxmlformats.org/drawingml/2006/main" xmlns:r="http://schemas.openxmlformats.org/officeDocument/2006/relationships" xmlns:p="http://schemas.openxmlformats.org/presentationml/2006/main" saveSubsetFonts="1">
   <p:sldMasterIdLst>
     <p:sldMasterId id="2147483648" r:id="rId1"/>
   </p:sldMasterIdLst>
+  <p:notesMasterIdLst>
+    <p:notesMasterId r:id="rId5"/>
+  </p:notesMasterIdLst>
   <p:sldIdLst>
-    <p:sldId id="256" r:id="rId7"/>
-    <p:sldId id="257" r:id="rId8"/>
-    <p:sldId id="258" r:id="rId9"/>
+    <p:sldId id="256" r:id="rId10"/>
+    <p:sldId id="257" r:id="rId11"/>
+    <p:sldId id="258" r:id="rId12"/>
   </p:sldIdLst>
   <p:sldSz cx="9144000" cy="6858000" type="screen4x3"/>
-  <p:notesSz cx="6858000" cy="9144000"/>
+  <p:notesSz cx="7010400" cy="9296400"/>
   <p:defaultTextStyle>
     <a:defPPr>
       <a:defRPr lang="en-US"/>
     </a:defPPr>
-    <a:lvl1pPr marL="0" algn="l" defTabSz="457200" rtl="0" eaLnBrk="1" latinLnBrk="0" hangingPunct="1">
+    <a:lvl1pPr marL="0" algn="l" defTabSz="914400" rtl="0" eaLnBrk="1" latinLnBrk="0" hangingPunct="1">
       <a:defRPr sz="1800" kern="1200">
         <a:solidFill>
           <a:schemeClr val="tx1"/>
@@ -25,7 +28,7 @@
         <a:cs typeface="+mn-cs"/>
       </a:defRPr>
     </a:lvl1pPr>
-    <a:lvl2pPr marL="457200" algn="l" defTabSz="457200" rtl="0" eaLnBrk="1" latinLnBrk="0" hangingPunct="1">
+    <a:lvl2pPr marL="457200" algn="l" defTabSz="914400" rtl="0" eaLnBrk="1" latinLnBrk="0" hangingPunct="1">
       <a:defRPr sz="1800" kern="1200">
         <a:solidFill>
           <a:schemeClr val="tx1"/>
@@ -35,7 +38,7 @@
         <a:cs typeface="+mn-cs"/>
       </a:defRPr>
     </a:lvl2pPr>
-    <a:lvl3pPr marL="914400" algn="l" defTabSz="457200" rtl="0" eaLnBrk="1" latinLnBrk="0" hangingPunct="1">
+    <a:lvl3pPr marL="914400" algn="l" defTabSz="914400" rtl="0" eaLnBrk="1" latinLnBrk="0" hangingPunct="1">
       <a:defRPr sz="1800" kern="1200">
         <a:solidFill>
           <a:schemeClr val="tx1"/>
@@ -45,7 +48,7 @@
         <a:cs typeface="+mn-cs"/>
       </a:defRPr>
     </a:lvl3pPr>
-    <a:lvl4pPr marL="1371600" algn="l" defTabSz="457200" rtl="0" eaLnBrk="1" latinLnBrk="0" hangingPunct="1">
+    <a:lvl4pPr marL="1371600" algn="l" defTabSz="914400" rtl="0" eaLnBrk="1" latinLnBrk="0" hangingPunct="1">
       <a:defRPr sz="1800" kern="1200">
         <a:solidFill>
           <a:schemeClr val="tx1"/>
@@ -55,7 +58,7 @@
         <a:cs typeface="+mn-cs"/>
       </a:defRPr>
     </a:lvl4pPr>
-    <a:lvl5pPr marL="1828800" algn="l" defTabSz="457200" rtl="0" eaLnBrk="1" latinLnBrk="0" hangingPunct="1">
+    <a:lvl5pPr marL="1828800" algn="l" defTabSz="914400" rtl="0" eaLnBrk="1" latinLnBrk="0" hangingPunct="1">
       <a:defRPr sz="1800" kern="1200">
         <a:solidFill>
           <a:schemeClr val="tx1"/>
@@ -65,7 +68,7 @@
         <a:cs typeface="+mn-cs"/>
       </a:defRPr>
     </a:lvl5pPr>
-    <a:lvl6pPr marL="2286000" algn="l" defTabSz="457200" rtl="0" eaLnBrk="1" latinLnBrk="0" hangingPunct="1">
+    <a:lvl6pPr marL="2286000" algn="l" defTabSz="914400" rtl="0" eaLnBrk="1" latinLnBrk="0" hangingPunct="1">
       <a:defRPr sz="1800" kern="1200">
         <a:solidFill>
           <a:schemeClr val="tx1"/>
@@ -75,7 +78,7 @@
         <a:cs typeface="+mn-cs"/>
       </a:defRPr>
     </a:lvl6pPr>
-    <a:lvl7pPr marL="2743200" algn="l" defTabSz="457200" rtl="0" eaLnBrk="1" latinLnBrk="0" hangingPunct="1">
+    <a:lvl7pPr marL="2743200" algn="l" defTabSz="914400" rtl="0" eaLnBrk="1" latinLnBrk="0" hangingPunct="1">
       <a:defRPr sz="1800" kern="1200">
         <a:solidFill>
           <a:schemeClr val="tx1"/>
@@ -85,7 +88,7 @@
         <a:cs typeface="+mn-cs"/>
       </a:defRPr>
     </a:lvl7pPr>
-    <a:lvl8pPr marL="3200400" algn="l" defTabSz="457200" rtl="0" eaLnBrk="1" latinLnBrk="0" hangingPunct="1">
+    <a:lvl8pPr marL="3200400" algn="l" defTabSz="914400" rtl="0" eaLnBrk="1" latinLnBrk="0" hangingPunct="1">
       <a:defRPr sz="1800" kern="1200">
         <a:solidFill>
           <a:schemeClr val="tx1"/>
@@ -95,7 +98,7 @@
         <a:cs typeface="+mn-cs"/>
       </a:defRPr>
     </a:lvl8pPr>
-    <a:lvl9pPr marL="3657600" algn="l" defTabSz="457200" rtl="0" eaLnBrk="1" latinLnBrk="0" hangingPunct="1">
+    <a:lvl9pPr marL="3657600" algn="l" defTabSz="914400" rtl="0" eaLnBrk="1" latinLnBrk="0" hangingPunct="1">
       <a:defRPr sz="1800" kern="1200">
         <a:solidFill>
           <a:schemeClr val="tx1"/>
@@ -107,6 +110,353 @@
     </a:lvl9pPr>
   </p:defaultTextStyle>
 </p:presentation>
+</file>
+
+<file path=ppt/notesMasters/notesMaster1.xml><?xml version="1.0" encoding="utf-8"?>
+<p:notesMaster xmlns:a="http://schemas.openxmlformats.org/drawingml/2006/main" xmlns:r="http://schemas.openxmlformats.org/officeDocument/2006/relationships" xmlns:p="http://schemas.openxmlformats.org/presentationml/2006/main">
+  <p:cSld>
+    <p:bg>
+      <p:bgRef idx="1001">
+        <a:schemeClr val="bg1"/>
+      </p:bgRef>
+    </p:bg>
+    <p:spTree>
+      <p:nvGrpSpPr>
+        <p:cNvPr id="1" name=""/>
+        <p:cNvGrpSpPr/>
+        <p:nvPr/>
+      </p:nvGrpSpPr>
+      <p:grpSpPr>
+        <a:xfrm>
+          <a:off x="0" y="0"/>
+          <a:ext cx="0" cy="0"/>
+          <a:chOff x="0" y="0"/>
+          <a:chExt cx="0" cy="0"/>
+        </a:xfrm>
+      </p:grpSpPr>
+      <p:sp>
+        <p:nvSpPr>
+          <p:cNvPr id="2" name="Header Placeholder 1"/>
+          <p:cNvSpPr>
+            <a:spLocks noGrp="1"/>
+          </p:cNvSpPr>
+          <p:nvPr>
+            <p:ph type="hdr" sz="quarter"/>
+          </p:nvPr>
+        </p:nvSpPr>
+        <p:spPr>
+          <a:xfrm>
+            <a:off x="0" y="0"/>
+            <a:ext cx="3037840" cy="464820"/>
+          </a:xfrm>
+          <a:prstGeom prst="rect">
+            <a:avLst/>
+          </a:prstGeom>
+        </p:spPr>
+        <p:txBody>
+          <a:bodyPr vert="horz" lIns="93177" tIns="46589" rIns="93177" bIns="46589" rtlCol="0"/>
+          <a:lstStyle>
+            <a:lvl1pPr algn="l">
+              <a:defRPr sz="1200"/>
+            </a:lvl1pPr>
+          </a:lstStyle>
+          <a:p>
+            <a:endParaRPr lang="en-US"/>
+          </a:p>
+        </p:txBody>
+      </p:sp>
+      <p:sp>
+        <p:nvSpPr>
+          <p:cNvPr id="3" name="Date Placeholder 2"/>
+          <p:cNvSpPr>
+            <a:spLocks noGrp="1"/>
+          </p:cNvSpPr>
+          <p:nvPr>
+            <p:ph type="dt" idx="1"/>
+          </p:nvPr>
+        </p:nvSpPr>
+        <p:spPr>
+          <a:xfrm>
+            <a:off x="3970938" y="0"/>
+            <a:ext cx="3037840" cy="464820"/>
+          </a:xfrm>
+          <a:prstGeom prst="rect">
+            <a:avLst/>
+          </a:prstGeom>
+        </p:spPr>
+        <p:txBody>
+          <a:bodyPr vert="horz" lIns="93177" tIns="46589" rIns="93177" bIns="46589" rtlCol="0"/>
+          <a:lstStyle>
+            <a:lvl1pPr algn="r">
+              <a:defRPr sz="1200"/>
+            </a:lvl1pPr>
+          </a:lstStyle>
+          <a:p>
+            <a:fld id="{1F114B58-2238-4F3F-92DD-85FFB84F91E6}" type="datetimeFigureOut">
+              <a:rPr lang="en-US" smtClean="0"/>
+              <a:t>12/13/2008</a:t>
+            </a:fld>
+            <a:endParaRPr lang="en-US"/>
+          </a:p>
+        </p:txBody>
+      </p:sp>
+      <p:sp>
+        <p:nvSpPr>
+          <p:cNvPr id="4" name="Slide Image Placeholder 3"/>
+          <p:cNvSpPr>
+            <a:spLocks noGrp="1" noRot="1" noChangeAspect="1"/>
+          </p:cNvSpPr>
+          <p:nvPr>
+            <p:ph type="sldImg" idx="2"/>
+          </p:nvPr>
+        </p:nvSpPr>
+        <p:spPr>
+          <a:xfrm>
+            <a:off x="1181100" y="696913"/>
+            <a:ext cx="4648200" cy="3486150"/>
+          </a:xfrm>
+          <a:prstGeom prst="rect">
+            <a:avLst/>
+          </a:prstGeom>
+          <a:noFill/>
+          <a:ln w="12700">
+            <a:solidFill>
+              <a:prstClr val="black"/>
+            </a:solidFill>
+          </a:ln>
+        </p:spPr>
+        <p:txBody>
+          <a:bodyPr vert="horz" lIns="93177" tIns="46589" rIns="93177" bIns="46589" rtlCol="0" anchor="ctr"/>
+          <a:lstStyle/>
+          <a:p>
+            <a:endParaRPr lang="en-US"/>
+          </a:p>
+        </p:txBody>
+      </p:sp>
+      <p:sp>
+        <p:nvSpPr>
+          <p:cNvPr id="5" name="Notes Placeholder 4"/>
+          <p:cNvSpPr>
+            <a:spLocks noGrp="1"/>
+          </p:cNvSpPr>
+          <p:nvPr>
+            <p:ph type="body" sz="quarter" idx="3"/>
+          </p:nvPr>
+        </p:nvSpPr>
+        <p:spPr>
+          <a:xfrm>
+            <a:off x="701040" y="4415790"/>
+            <a:ext cx="5608320" cy="4183380"/>
+          </a:xfrm>
+          <a:prstGeom prst="rect">
+            <a:avLst/>
+          </a:prstGeom>
+        </p:spPr>
+        <p:txBody>
+          <a:bodyPr vert="horz" lIns="93177" tIns="46589" rIns="93177" bIns="46589" rtlCol="0">
+            <a:normAutofit/>
+          </a:bodyPr>
+          <a:lstStyle/>
+          <a:p>
+            <a:pPr lvl="0"/>
+            <a:r>
+              <a:rPr lang="en-US" smtClean="0"/>
+              <a:t>Click to edit Master text styles</a:t>
+            </a:r>
+          </a:p>
+          <a:p>
+            <a:pPr lvl="1"/>
+            <a:r>
+              <a:rPr lang="en-US" smtClean="0"/>
+              <a:t>Second level</a:t>
+            </a:r>
+          </a:p>
+          <a:p>
+            <a:pPr lvl="2"/>
+            <a:r>
+              <a:rPr lang="en-US" smtClean="0"/>
+              <a:t>Third level</a:t>
+            </a:r>
+          </a:p>
+          <a:p>
+            <a:pPr lvl="3"/>
+            <a:r>
+              <a:rPr lang="en-US" smtClean="0"/>
+              <a:t>Fourth level</a:t>
+            </a:r>
+          </a:p>
+          <a:p>
+            <a:pPr lvl="4"/>
+            <a:r>
+              <a:rPr lang="en-US" smtClean="0"/>
+              <a:t>Fifth level</a:t>
+            </a:r>
+            <a:endParaRPr lang="en-US"/>
+          </a:p>
+        </p:txBody>
+      </p:sp>
+      <p:sp>
+        <p:nvSpPr>
+          <p:cNvPr id="6" name="Footer Placeholder 5"/>
+          <p:cNvSpPr>
+            <a:spLocks noGrp="1"/>
+          </p:cNvSpPr>
+          <p:nvPr>
+            <p:ph type="ftr" sz="quarter" idx="4"/>
+          </p:nvPr>
+        </p:nvSpPr>
+        <p:spPr>
+          <a:xfrm>
+            <a:off x="0" y="8829967"/>
+            <a:ext cx="3037840" cy="464820"/>
+          </a:xfrm>
+          <a:prstGeom prst="rect">
+            <a:avLst/>
+          </a:prstGeom>
+        </p:spPr>
+        <p:txBody>
+          <a:bodyPr vert="horz" lIns="93177" tIns="46589" rIns="93177" bIns="46589" rtlCol="0" anchor="b"/>
+          <a:lstStyle>
+            <a:lvl1pPr algn="l">
+              <a:defRPr sz="1200"/>
+            </a:lvl1pPr>
+          </a:lstStyle>
+          <a:p>
+            <a:endParaRPr lang="en-US"/>
+          </a:p>
+        </p:txBody>
+      </p:sp>
+      <p:sp>
+        <p:nvSpPr>
+          <p:cNvPr id="7" name="Slide Number Placeholder 6"/>
+          <p:cNvSpPr>
+            <a:spLocks noGrp="1"/>
+          </p:cNvSpPr>
+          <p:nvPr>
+            <p:ph type="sldNum" sz="quarter" idx="5"/>
+          </p:nvPr>
+        </p:nvSpPr>
+        <p:spPr>
+          <a:xfrm>
+            <a:off x="3970938" y="8829967"/>
+            <a:ext cx="3037840" cy="464820"/>
+          </a:xfrm>
+          <a:prstGeom prst="rect">
+            <a:avLst/>
+          </a:prstGeom>
+        </p:spPr>
+        <p:txBody>
+          <a:bodyPr vert="horz" lIns="93177" tIns="46589" rIns="93177" bIns="46589" rtlCol="0" anchor="b"/>
+          <a:lstStyle>
+            <a:lvl1pPr algn="r">
+              <a:defRPr sz="1200"/>
+            </a:lvl1pPr>
+          </a:lstStyle>
+          <a:p>
+            <a:fld id="{AB160034-232D-4C35-AC1F-281A0D338D39}" type="slidenum">
+              <a:rPr lang="en-US" smtClean="0"/>
+              <a:t>‹#›</a:t>
+            </a:fld>
+            <a:endParaRPr lang="en-US"/>
+          </a:p>
+        </p:txBody>
+      </p:sp>
+    </p:spTree>
+  </p:cSld>
+  <p:clrMap bg1="lt1" tx1="dk1" bg2="lt2" tx2="dk2" accent1="accent1" accent2="accent2" accent3="accent3" accent4="accent4" accent5="accent5" accent6="accent6" hlink="hlink" folHlink="folHlink"/>
+  <p:notesStyle>
+    <a:lvl1pPr marL="0" algn="l" defTabSz="914400" rtl="0" eaLnBrk="1" latinLnBrk="0" hangingPunct="1">
+      <a:defRPr sz="1200" kern="1200">
+        <a:solidFill>
+          <a:schemeClr val="tx1"/>
+        </a:solidFill>
+        <a:latin typeface="+mn-lt"/>
+        <a:ea typeface="+mn-ea"/>
+        <a:cs typeface="+mn-cs"/>
+      </a:defRPr>
+    </a:lvl1pPr>
+    <a:lvl2pPr marL="457200" algn="l" defTabSz="914400" rtl="0" eaLnBrk="1" latinLnBrk="0" hangingPunct="1">
+      <a:defRPr sz="1200" kern="1200">
+        <a:solidFill>
+          <a:schemeClr val="tx1"/>
+        </a:solidFill>
+        <a:latin typeface="+mn-lt"/>
+        <a:ea typeface="+mn-ea"/>
+        <a:cs typeface="+mn-cs"/>
+      </a:defRPr>
+    </a:lvl2pPr>
+    <a:lvl3pPr marL="914400" algn="l" defTabSz="914400" rtl="0" eaLnBrk="1" latinLnBrk="0" hangingPunct="1">
+      <a:defRPr sz="1200" kern="1200">
+        <a:solidFill>
+          <a:schemeClr val="tx1"/>
+        </a:solidFill>
+        <a:latin typeface="+mn-lt"/>
+        <a:ea typeface="+mn-ea"/>
+        <a:cs typeface="+mn-cs"/>
+      </a:defRPr>
+    </a:lvl3pPr>
+    <a:lvl4pPr marL="1371600" algn="l" defTabSz="914400" rtl="0" eaLnBrk="1" latinLnBrk="0" hangingPunct="1">
+      <a:defRPr sz="1200" kern="1200">
+        <a:solidFill>
+          <a:schemeClr val="tx1"/>
+        </a:solidFill>
+        <a:latin typeface="+mn-lt"/>
+        <a:ea typeface="+mn-ea"/>
+        <a:cs typeface="+mn-cs"/>
+      </a:defRPr>
+    </a:lvl4pPr>
+    <a:lvl5pPr marL="1828800" algn="l" defTabSz="914400" rtl="0" eaLnBrk="1" latinLnBrk="0" hangingPunct="1">
+      <a:defRPr sz="1200" kern="1200">
+        <a:solidFill>
+          <a:schemeClr val="tx1"/>
+        </a:solidFill>
+        <a:latin typeface="+mn-lt"/>
+        <a:ea typeface="+mn-ea"/>
+        <a:cs typeface="+mn-cs"/>
+      </a:defRPr>
+    </a:lvl5pPr>
+    <a:lvl6pPr marL="2286000" algn="l" defTabSz="914400" rtl="0" eaLnBrk="1" latinLnBrk="0" hangingPunct="1">
+      <a:defRPr sz="1200" kern="1200">
+        <a:solidFill>
+          <a:schemeClr val="tx1"/>
+        </a:solidFill>
+        <a:latin typeface="+mn-lt"/>
+        <a:ea typeface="+mn-ea"/>
+        <a:cs typeface="+mn-cs"/>
+      </a:defRPr>
+    </a:lvl6pPr>
+    <a:lvl7pPr marL="2743200" algn="l" defTabSz="914400" rtl="0" eaLnBrk="1" latinLnBrk="0" hangingPunct="1">
+      <a:defRPr sz="1200" kern="1200">
+        <a:solidFill>
+          <a:schemeClr val="tx1"/>
+        </a:solidFill>
+        <a:latin typeface="+mn-lt"/>
+        <a:ea typeface="+mn-ea"/>
+        <a:cs typeface="+mn-cs"/>
+      </a:defRPr>
+    </a:lvl7pPr>
+    <a:lvl8pPr marL="3200400" algn="l" defTabSz="914400" rtl="0" eaLnBrk="1" latinLnBrk="0" hangingPunct="1">
+      <a:defRPr sz="1200" kern="1200">
+        <a:solidFill>
+          <a:schemeClr val="tx1"/>
+        </a:solidFill>
+        <a:latin typeface="+mn-lt"/>
+        <a:ea typeface="+mn-ea"/>
+        <a:cs typeface="+mn-cs"/>
+      </a:defRPr>
+    </a:lvl8pPr>
+    <a:lvl9pPr marL="3657600" algn="l" defTabSz="914400" rtl="0" eaLnBrk="1" latinLnBrk="0" hangingPunct="1">
+      <a:defRPr sz="1200" kern="1200">
+        <a:solidFill>
+          <a:schemeClr val="tx1"/>
+        </a:solidFill>
+        <a:latin typeface="+mn-lt"/>
+        <a:ea typeface="+mn-ea"/>
+        <a:cs typeface="+mn-cs"/>
+      </a:defRPr>
+    </a:lvl9pPr>
+  </p:notesStyle>
+</p:notesMaster>
 </file>
 
 <file path=ppt/slideLayouts/slideLayout1.xml><?xml version="1.0" encoding="utf-8"?>
@@ -288,9 +638,9 @@
           <a:bodyPr/>
           <a:lstStyle/>
           <a:p>
-            <a:fld id="{5BCAD085-E8A6-8845-BD4E-CB4CCA059FC4}" type="datetimeFigureOut">
-              <a:rPr lang="en-US" smtClean="0"/>
-              <a:t>1/27/13</a:t>
+            <a:fld id="{EB574306-02AE-426A-AAED-848208576C7F}" type="datetimeFigureOut">
+              <a:rPr lang="en-US" smtClean="0"/>
+              <a:t>12/13/2008</a:t>
             </a:fld>
             <a:endParaRPr lang="en-US"/>
           </a:p>
@@ -330,7 +680,7 @@
           <a:bodyPr/>
           <a:lstStyle/>
           <a:p>
-            <a:fld id="{C1FF6DA9-008F-8B48-92A6-B652298478BF}" type="slidenum">
+            <a:fld id="{652EFCB8-7653-4C48-8D1B-3C032576C0E2}" type="slidenum">
               <a:rPr lang="en-US" smtClean="0"/>
               <a:t>‹#›</a:t>
             </a:fld>
@@ -339,11 +689,6 @@
         </p:txBody>
       </p:sp>
     </p:spTree>
-    <p:extLst>
-      <p:ext uri="{BB962C8B-B14F-4D97-AF65-F5344CB8AC3E}">
-        <p14:creationId xmlns:p14="http://schemas.microsoft.com/office/powerpoint/2010/main" val="3168075583"/>
-      </p:ext>
-    </p:extLst>
   </p:cSld>
   <p:clrMapOvr>
     <a:masterClrMapping/>
@@ -458,9 +803,9 @@
           <a:bodyPr/>
           <a:lstStyle/>
           <a:p>
-            <a:fld id="{5BCAD085-E8A6-8845-BD4E-CB4CCA059FC4}" type="datetimeFigureOut">
-              <a:rPr lang="en-US" smtClean="0"/>
-              <a:t>1/27/13</a:t>
+            <a:fld id="{EB574306-02AE-426A-AAED-848208576C7F}" type="datetimeFigureOut">
+              <a:rPr lang="en-US" smtClean="0"/>
+              <a:t>12/13/2008</a:t>
             </a:fld>
             <a:endParaRPr lang="en-US"/>
           </a:p>
@@ -500,7 +845,7 @@
           <a:bodyPr/>
           <a:lstStyle/>
           <a:p>
-            <a:fld id="{C1FF6DA9-008F-8B48-92A6-B652298478BF}" type="slidenum">
+            <a:fld id="{652EFCB8-7653-4C48-8D1B-3C032576C0E2}" type="slidenum">
               <a:rPr lang="en-US" smtClean="0"/>
               <a:t>‹#›</a:t>
             </a:fld>
@@ -509,11 +854,6 @@
         </p:txBody>
       </p:sp>
     </p:spTree>
-    <p:extLst>
-      <p:ext uri="{BB962C8B-B14F-4D97-AF65-F5344CB8AC3E}">
-        <p14:creationId xmlns:p14="http://schemas.microsoft.com/office/powerpoint/2010/main" val="2910927964"/>
-      </p:ext>
-    </p:extLst>
   </p:cSld>
   <p:clrMapOvr>
     <a:masterClrMapping/>
@@ -638,9 +978,9 @@
           <a:bodyPr/>
           <a:lstStyle/>
           <a:p>
-            <a:fld id="{5BCAD085-E8A6-8845-BD4E-CB4CCA059FC4}" type="datetimeFigureOut">
-              <a:rPr lang="en-US" smtClean="0"/>
-              <a:t>1/27/13</a:t>
+            <a:fld id="{EB574306-02AE-426A-AAED-848208576C7F}" type="datetimeFigureOut">
+              <a:rPr lang="en-US" smtClean="0"/>
+              <a:t>12/13/2008</a:t>
             </a:fld>
             <a:endParaRPr lang="en-US"/>
           </a:p>
@@ -680,7 +1020,7 @@
           <a:bodyPr/>
           <a:lstStyle/>
           <a:p>
-            <a:fld id="{C1FF6DA9-008F-8B48-92A6-B652298478BF}" type="slidenum">
+            <a:fld id="{652EFCB8-7653-4C48-8D1B-3C032576C0E2}" type="slidenum">
               <a:rPr lang="en-US" smtClean="0"/>
               <a:t>‹#›</a:t>
             </a:fld>
@@ -689,11 +1029,6 @@
         </p:txBody>
       </p:sp>
     </p:spTree>
-    <p:extLst>
-      <p:ext uri="{BB962C8B-B14F-4D97-AF65-F5344CB8AC3E}">
-        <p14:creationId xmlns:p14="http://schemas.microsoft.com/office/powerpoint/2010/main" val="3612223792"/>
-      </p:ext>
-    </p:extLst>
   </p:cSld>
   <p:clrMapOvr>
     <a:masterClrMapping/>
@@ -808,9 +1143,9 @@
           <a:bodyPr/>
           <a:lstStyle/>
           <a:p>
-            <a:fld id="{5BCAD085-E8A6-8845-BD4E-CB4CCA059FC4}" type="datetimeFigureOut">
-              <a:rPr lang="en-US" smtClean="0"/>
-              <a:t>1/27/13</a:t>
+            <a:fld id="{EB574306-02AE-426A-AAED-848208576C7F}" type="datetimeFigureOut">
+              <a:rPr lang="en-US" smtClean="0"/>
+              <a:t>12/13/2008</a:t>
             </a:fld>
             <a:endParaRPr lang="en-US"/>
           </a:p>
@@ -850,7 +1185,7 @@
           <a:bodyPr/>
           <a:lstStyle/>
           <a:p>
-            <a:fld id="{C1FF6DA9-008F-8B48-92A6-B652298478BF}" type="slidenum">
+            <a:fld id="{652EFCB8-7653-4C48-8D1B-3C032576C0E2}" type="slidenum">
               <a:rPr lang="en-US" smtClean="0"/>
               <a:t>‹#›</a:t>
             </a:fld>
@@ -859,11 +1194,6 @@
         </p:txBody>
       </p:sp>
     </p:spTree>
-    <p:extLst>
-      <p:ext uri="{BB962C8B-B14F-4D97-AF65-F5344CB8AC3E}">
-        <p14:creationId xmlns:p14="http://schemas.microsoft.com/office/powerpoint/2010/main" val="2614314258"/>
-      </p:ext>
-    </p:extLst>
   </p:cSld>
   <p:clrMapOvr>
     <a:masterClrMapping/>
@@ -1054,9 +1384,9 @@
           <a:bodyPr/>
           <a:lstStyle/>
           <a:p>
-            <a:fld id="{5BCAD085-E8A6-8845-BD4E-CB4CCA059FC4}" type="datetimeFigureOut">
-              <a:rPr lang="en-US" smtClean="0"/>
-              <a:t>1/27/13</a:t>
+            <a:fld id="{EB574306-02AE-426A-AAED-848208576C7F}" type="datetimeFigureOut">
+              <a:rPr lang="en-US" smtClean="0"/>
+              <a:t>12/13/2008</a:t>
             </a:fld>
             <a:endParaRPr lang="en-US"/>
           </a:p>
@@ -1096,7 +1426,7 @@
           <a:bodyPr/>
           <a:lstStyle/>
           <a:p>
-            <a:fld id="{C1FF6DA9-008F-8B48-92A6-B652298478BF}" type="slidenum">
+            <a:fld id="{652EFCB8-7653-4C48-8D1B-3C032576C0E2}" type="slidenum">
               <a:rPr lang="en-US" smtClean="0"/>
               <a:t>‹#›</a:t>
             </a:fld>
@@ -1105,11 +1435,6 @@
         </p:txBody>
       </p:sp>
     </p:spTree>
-    <p:extLst>
-      <p:ext uri="{BB962C8B-B14F-4D97-AF65-F5344CB8AC3E}">
-        <p14:creationId xmlns:p14="http://schemas.microsoft.com/office/powerpoint/2010/main" val="960648375"/>
-      </p:ext>
-    </p:extLst>
   </p:cSld>
   <p:clrMapOvr>
     <a:masterClrMapping/>
@@ -1342,9 +1667,9 @@
           <a:bodyPr/>
           <a:lstStyle/>
           <a:p>
-            <a:fld id="{5BCAD085-E8A6-8845-BD4E-CB4CCA059FC4}" type="datetimeFigureOut">
-              <a:rPr lang="en-US" smtClean="0"/>
-              <a:t>1/27/13</a:t>
+            <a:fld id="{EB574306-02AE-426A-AAED-848208576C7F}" type="datetimeFigureOut">
+              <a:rPr lang="en-US" smtClean="0"/>
+              <a:t>12/13/2008</a:t>
             </a:fld>
             <a:endParaRPr lang="en-US"/>
           </a:p>
@@ -1384,7 +1709,7 @@
           <a:bodyPr/>
           <a:lstStyle/>
           <a:p>
-            <a:fld id="{C1FF6DA9-008F-8B48-92A6-B652298478BF}" type="slidenum">
+            <a:fld id="{652EFCB8-7653-4C48-8D1B-3C032576C0E2}" type="slidenum">
               <a:rPr lang="en-US" smtClean="0"/>
               <a:t>‹#›</a:t>
             </a:fld>
@@ -1393,11 +1718,6 @@
         </p:txBody>
       </p:sp>
     </p:spTree>
-    <p:extLst>
-      <p:ext uri="{BB962C8B-B14F-4D97-AF65-F5344CB8AC3E}">
-        <p14:creationId xmlns:p14="http://schemas.microsoft.com/office/powerpoint/2010/main" val="2782244947"/>
-      </p:ext>
-    </p:extLst>
   </p:cSld>
   <p:clrMapOvr>
     <a:masterClrMapping/>
@@ -1764,9 +2084,9 @@
           <a:bodyPr/>
           <a:lstStyle/>
           <a:p>
-            <a:fld id="{5BCAD085-E8A6-8845-BD4E-CB4CCA059FC4}" type="datetimeFigureOut">
-              <a:rPr lang="en-US" smtClean="0"/>
-              <a:t>1/27/13</a:t>
+            <a:fld id="{EB574306-02AE-426A-AAED-848208576C7F}" type="datetimeFigureOut">
+              <a:rPr lang="en-US" smtClean="0"/>
+              <a:t>12/13/2008</a:t>
             </a:fld>
             <a:endParaRPr lang="en-US"/>
           </a:p>
@@ -1806,7 +2126,7 @@
           <a:bodyPr/>
           <a:lstStyle/>
           <a:p>
-            <a:fld id="{C1FF6DA9-008F-8B48-92A6-B652298478BF}" type="slidenum">
+            <a:fld id="{652EFCB8-7653-4C48-8D1B-3C032576C0E2}" type="slidenum">
               <a:rPr lang="en-US" smtClean="0"/>
               <a:t>‹#›</a:t>
             </a:fld>
@@ -1815,11 +2135,6 @@
         </p:txBody>
       </p:sp>
     </p:spTree>
-    <p:extLst>
-      <p:ext uri="{BB962C8B-B14F-4D97-AF65-F5344CB8AC3E}">
-        <p14:creationId xmlns:p14="http://schemas.microsoft.com/office/powerpoint/2010/main" val="990158736"/>
-      </p:ext>
-    </p:extLst>
   </p:cSld>
   <p:clrMapOvr>
     <a:masterClrMapping/>
@@ -1882,9 +2197,9 @@
           <a:bodyPr/>
           <a:lstStyle/>
           <a:p>
-            <a:fld id="{5BCAD085-E8A6-8845-BD4E-CB4CCA059FC4}" type="datetimeFigureOut">
-              <a:rPr lang="en-US" smtClean="0"/>
-              <a:t>1/27/13</a:t>
+            <a:fld id="{EB574306-02AE-426A-AAED-848208576C7F}" type="datetimeFigureOut">
+              <a:rPr lang="en-US" smtClean="0"/>
+              <a:t>12/13/2008</a:t>
             </a:fld>
             <a:endParaRPr lang="en-US"/>
           </a:p>
@@ -1924,7 +2239,7 @@
           <a:bodyPr/>
           <a:lstStyle/>
           <a:p>
-            <a:fld id="{C1FF6DA9-008F-8B48-92A6-B652298478BF}" type="slidenum">
+            <a:fld id="{652EFCB8-7653-4C48-8D1B-3C032576C0E2}" type="slidenum">
               <a:rPr lang="en-US" smtClean="0"/>
               <a:t>‹#›</a:t>
             </a:fld>
@@ -1933,11 +2248,6 @@
         </p:txBody>
       </p:sp>
     </p:spTree>
-    <p:extLst>
-      <p:ext uri="{BB962C8B-B14F-4D97-AF65-F5344CB8AC3E}">
-        <p14:creationId xmlns:p14="http://schemas.microsoft.com/office/powerpoint/2010/main" val="727027711"/>
-      </p:ext>
-    </p:extLst>
   </p:cSld>
   <p:clrMapOvr>
     <a:masterClrMapping/>
@@ -1977,9 +2287,9 @@
           <a:bodyPr/>
           <a:lstStyle/>
           <a:p>
-            <a:fld id="{5BCAD085-E8A6-8845-BD4E-CB4CCA059FC4}" type="datetimeFigureOut">
-              <a:rPr lang="en-US" smtClean="0"/>
-              <a:t>1/27/13</a:t>
+            <a:fld id="{EB574306-02AE-426A-AAED-848208576C7F}" type="datetimeFigureOut">
+              <a:rPr lang="en-US" smtClean="0"/>
+              <a:t>12/13/2008</a:t>
             </a:fld>
             <a:endParaRPr lang="en-US"/>
           </a:p>
@@ -2019,7 +2329,7 @@
           <a:bodyPr/>
           <a:lstStyle/>
           <a:p>
-            <a:fld id="{C1FF6DA9-008F-8B48-92A6-B652298478BF}" type="slidenum">
+            <a:fld id="{652EFCB8-7653-4C48-8D1B-3C032576C0E2}" type="slidenum">
               <a:rPr lang="en-US" smtClean="0"/>
               <a:t>‹#›</a:t>
             </a:fld>
@@ -2028,11 +2338,6 @@
         </p:txBody>
       </p:sp>
     </p:spTree>
-    <p:extLst>
-      <p:ext uri="{BB962C8B-B14F-4D97-AF65-F5344CB8AC3E}">
-        <p14:creationId xmlns:p14="http://schemas.microsoft.com/office/powerpoint/2010/main" val="1212999818"/>
-      </p:ext>
-    </p:extLst>
   </p:cSld>
   <p:clrMapOvr>
     <a:masterClrMapping/>
@@ -2254,9 +2559,9 @@
           <a:bodyPr/>
           <a:lstStyle/>
           <a:p>
-            <a:fld id="{5BCAD085-E8A6-8845-BD4E-CB4CCA059FC4}" type="datetimeFigureOut">
-              <a:rPr lang="en-US" smtClean="0"/>
-              <a:t>1/27/13</a:t>
+            <a:fld id="{EB574306-02AE-426A-AAED-848208576C7F}" type="datetimeFigureOut">
+              <a:rPr lang="en-US" smtClean="0"/>
+              <a:t>12/13/2008</a:t>
             </a:fld>
             <a:endParaRPr lang="en-US"/>
           </a:p>
@@ -2296,7 +2601,7 @@
           <a:bodyPr/>
           <a:lstStyle/>
           <a:p>
-            <a:fld id="{C1FF6DA9-008F-8B48-92A6-B652298478BF}" type="slidenum">
+            <a:fld id="{652EFCB8-7653-4C48-8D1B-3C032576C0E2}" type="slidenum">
               <a:rPr lang="en-US" smtClean="0"/>
               <a:t>‹#›</a:t>
             </a:fld>
@@ -2305,11 +2610,6 @@
         </p:txBody>
       </p:sp>
     </p:spTree>
-    <p:extLst>
-      <p:ext uri="{BB962C8B-B14F-4D97-AF65-F5344CB8AC3E}">
-        <p14:creationId xmlns:p14="http://schemas.microsoft.com/office/powerpoint/2010/main" val="1840726560"/>
-      </p:ext>
-    </p:extLst>
   </p:cSld>
   <p:clrMapOvr>
     <a:masterClrMapping/>
@@ -2507,9 +2807,9 @@
           <a:bodyPr/>
           <a:lstStyle/>
           <a:p>
-            <a:fld id="{5BCAD085-E8A6-8845-BD4E-CB4CCA059FC4}" type="datetimeFigureOut">
-              <a:rPr lang="en-US" smtClean="0"/>
-              <a:t>1/27/13</a:t>
+            <a:fld id="{EB574306-02AE-426A-AAED-848208576C7F}" type="datetimeFigureOut">
+              <a:rPr lang="en-US" smtClean="0"/>
+              <a:t>12/13/2008</a:t>
             </a:fld>
             <a:endParaRPr lang="en-US"/>
           </a:p>
@@ -2549,7 +2849,7 @@
           <a:bodyPr/>
           <a:lstStyle/>
           <a:p>
-            <a:fld id="{C1FF6DA9-008F-8B48-92A6-B652298478BF}" type="slidenum">
+            <a:fld id="{652EFCB8-7653-4C48-8D1B-3C032576C0E2}" type="slidenum">
               <a:rPr lang="en-US" smtClean="0"/>
               <a:t>‹#›</a:t>
             </a:fld>
@@ -2558,11 +2858,6 @@
         </p:txBody>
       </p:sp>
     </p:spTree>
-    <p:extLst>
-      <p:ext uri="{BB962C8B-B14F-4D97-AF65-F5344CB8AC3E}">
-        <p14:creationId xmlns:p14="http://schemas.microsoft.com/office/powerpoint/2010/main" val="3889236939"/>
-      </p:ext>
-    </p:extLst>
   </p:cSld>
   <p:clrMapOvr>
     <a:masterClrMapping/>
@@ -2720,9 +3015,9 @@
             </a:lvl1pPr>
           </a:lstStyle>
           <a:p>
-            <a:fld id="{5BCAD085-E8A6-8845-BD4E-CB4CCA059FC4}" type="datetimeFigureOut">
-              <a:rPr lang="en-US" smtClean="0"/>
-              <a:t>1/27/13</a:t>
+            <a:fld id="{EB574306-02AE-426A-AAED-848208576C7F}" type="datetimeFigureOut">
+              <a:rPr lang="en-US" smtClean="0"/>
+              <a:t>12/13/2008</a:t>
             </a:fld>
             <a:endParaRPr lang="en-US"/>
           </a:p>
@@ -2798,7 +3093,7 @@
             </a:lvl1pPr>
           </a:lstStyle>
           <a:p>
-            <a:fld id="{C1FF6DA9-008F-8B48-92A6-B652298478BF}" type="slidenum">
+            <a:fld id="{652EFCB8-7653-4C48-8D1B-3C032576C0E2}" type="slidenum">
               <a:rPr lang="en-US" smtClean="0"/>
               <a:t>‹#›</a:t>
             </a:fld>
@@ -2807,11 +3102,6 @@
         </p:txBody>
       </p:sp>
     </p:spTree>
-    <p:extLst>
-      <p:ext uri="{BB962C8B-B14F-4D97-AF65-F5344CB8AC3E}">
-        <p14:creationId xmlns:p14="http://schemas.microsoft.com/office/powerpoint/2010/main" val="2209977519"/>
-      </p:ext>
-    </p:extLst>
   </p:cSld>
   <p:clrMap bg1="lt1" tx1="dk1" bg2="lt2" tx2="dk2" accent1="accent1" accent2="accent2" accent3="accent3" accent4="accent4" accent5="accent5" accent6="accent6" hlink="hlink" folHlink="folHlink"/>
   <p:sldLayoutIdLst>
@@ -2829,7 +3119,7 @@
   </p:sldLayoutIdLst>
   <p:txStyles>
     <p:titleStyle>
-      <a:lvl1pPr algn="ctr" defTabSz="457200" rtl="0" eaLnBrk="1" latinLnBrk="0" hangingPunct="1">
+      <a:lvl1pPr algn="ctr" defTabSz="914400" rtl="0" eaLnBrk="1" latinLnBrk="0" hangingPunct="1">
         <a:spcBef>
           <a:spcPct val="0"/>
         </a:spcBef>
@@ -2845,11 +3135,11 @@
       </a:lvl1pPr>
     </p:titleStyle>
     <p:bodyStyle>
-      <a:lvl1pPr marL="342900" indent="-342900" algn="l" defTabSz="457200" rtl="0" eaLnBrk="1" latinLnBrk="0" hangingPunct="1">
+      <a:lvl1pPr marL="342900" indent="-342900" algn="l" defTabSz="914400" rtl="0" eaLnBrk="1" latinLnBrk="0" hangingPunct="1">
         <a:spcBef>
           <a:spcPct val="20000"/>
         </a:spcBef>
-        <a:buFont typeface="Arial"/>
+        <a:buFont typeface="Arial" pitchFamily="34" charset="0"/>
         <a:buChar char="•"/>
         <a:defRPr sz="3200" kern="1200">
           <a:solidFill>
@@ -2860,11 +3150,11 @@
           <a:cs typeface="+mn-cs"/>
         </a:defRPr>
       </a:lvl1pPr>
-      <a:lvl2pPr marL="742950" indent="-285750" algn="l" defTabSz="457200" rtl="0" eaLnBrk="1" latinLnBrk="0" hangingPunct="1">
+      <a:lvl2pPr marL="742950" indent="-285750" algn="l" defTabSz="914400" rtl="0" eaLnBrk="1" latinLnBrk="0" hangingPunct="1">
         <a:spcBef>
           <a:spcPct val="20000"/>
         </a:spcBef>
-        <a:buFont typeface="Arial"/>
+        <a:buFont typeface="Arial" pitchFamily="34" charset="0"/>
         <a:buChar char="–"/>
         <a:defRPr sz="2800" kern="1200">
           <a:solidFill>
@@ -2875,11 +3165,11 @@
           <a:cs typeface="+mn-cs"/>
         </a:defRPr>
       </a:lvl2pPr>
-      <a:lvl3pPr marL="1143000" indent="-228600" algn="l" defTabSz="457200" rtl="0" eaLnBrk="1" latinLnBrk="0" hangingPunct="1">
+      <a:lvl3pPr marL="1143000" indent="-228600" algn="l" defTabSz="914400" rtl="0" eaLnBrk="1" latinLnBrk="0" hangingPunct="1">
         <a:spcBef>
           <a:spcPct val="20000"/>
         </a:spcBef>
-        <a:buFont typeface="Arial"/>
+        <a:buFont typeface="Arial" pitchFamily="34" charset="0"/>
         <a:buChar char="•"/>
         <a:defRPr sz="2400" kern="1200">
           <a:solidFill>
@@ -2890,11 +3180,11 @@
           <a:cs typeface="+mn-cs"/>
         </a:defRPr>
       </a:lvl3pPr>
-      <a:lvl4pPr marL="1600200" indent="-228600" algn="l" defTabSz="457200" rtl="0" eaLnBrk="1" latinLnBrk="0" hangingPunct="1">
+      <a:lvl4pPr marL="1600200" indent="-228600" algn="l" defTabSz="914400" rtl="0" eaLnBrk="1" latinLnBrk="0" hangingPunct="1">
         <a:spcBef>
           <a:spcPct val="20000"/>
         </a:spcBef>
-        <a:buFont typeface="Arial"/>
+        <a:buFont typeface="Arial" pitchFamily="34" charset="0"/>
         <a:buChar char="–"/>
         <a:defRPr sz="2000" kern="1200">
           <a:solidFill>
@@ -2905,11 +3195,11 @@
           <a:cs typeface="+mn-cs"/>
         </a:defRPr>
       </a:lvl4pPr>
-      <a:lvl5pPr marL="2057400" indent="-228600" algn="l" defTabSz="457200" rtl="0" eaLnBrk="1" latinLnBrk="0" hangingPunct="1">
+      <a:lvl5pPr marL="2057400" indent="-228600" algn="l" defTabSz="914400" rtl="0" eaLnBrk="1" latinLnBrk="0" hangingPunct="1">
         <a:spcBef>
           <a:spcPct val="20000"/>
         </a:spcBef>
-        <a:buFont typeface="Arial"/>
+        <a:buFont typeface="Arial" pitchFamily="34" charset="0"/>
         <a:buChar char="»"/>
         <a:defRPr sz="2000" kern="1200">
           <a:solidFill>
@@ -2920,11 +3210,11 @@
           <a:cs typeface="+mn-cs"/>
         </a:defRPr>
       </a:lvl5pPr>
-      <a:lvl6pPr marL="2514600" indent="-228600" algn="l" defTabSz="457200" rtl="0" eaLnBrk="1" latinLnBrk="0" hangingPunct="1">
+      <a:lvl6pPr marL="2514600" indent="-228600" algn="l" defTabSz="914400" rtl="0" eaLnBrk="1" latinLnBrk="0" hangingPunct="1">
         <a:spcBef>
           <a:spcPct val="20000"/>
         </a:spcBef>
-        <a:buFont typeface="Arial"/>
+        <a:buFont typeface="Arial" pitchFamily="34" charset="0"/>
         <a:buChar char="•"/>
         <a:defRPr sz="2000" kern="1200">
           <a:solidFill>
@@ -2935,11 +3225,11 @@
           <a:cs typeface="+mn-cs"/>
         </a:defRPr>
       </a:lvl6pPr>
-      <a:lvl7pPr marL="2971800" indent="-228600" algn="l" defTabSz="457200" rtl="0" eaLnBrk="1" latinLnBrk="0" hangingPunct="1">
+      <a:lvl7pPr marL="2971800" indent="-228600" algn="l" defTabSz="914400" rtl="0" eaLnBrk="1" latinLnBrk="0" hangingPunct="1">
         <a:spcBef>
           <a:spcPct val="20000"/>
         </a:spcBef>
-        <a:buFont typeface="Arial"/>
+        <a:buFont typeface="Arial" pitchFamily="34" charset="0"/>
         <a:buChar char="•"/>
         <a:defRPr sz="2000" kern="1200">
           <a:solidFill>
@@ -2950,11 +3240,11 @@
           <a:cs typeface="+mn-cs"/>
         </a:defRPr>
       </a:lvl7pPr>
-      <a:lvl8pPr marL="3429000" indent="-228600" algn="l" defTabSz="457200" rtl="0" eaLnBrk="1" latinLnBrk="0" hangingPunct="1">
+      <a:lvl8pPr marL="3429000" indent="-228600" algn="l" defTabSz="914400" rtl="0" eaLnBrk="1" latinLnBrk="0" hangingPunct="1">
         <a:spcBef>
           <a:spcPct val="20000"/>
         </a:spcBef>
-        <a:buFont typeface="Arial"/>
+        <a:buFont typeface="Arial" pitchFamily="34" charset="0"/>
         <a:buChar char="•"/>
         <a:defRPr sz="2000" kern="1200">
           <a:solidFill>
@@ -2965,11 +3255,11 @@
           <a:cs typeface="+mn-cs"/>
         </a:defRPr>
       </a:lvl8pPr>
-      <a:lvl9pPr marL="3886200" indent="-228600" algn="l" defTabSz="457200" rtl="0" eaLnBrk="1" latinLnBrk="0" hangingPunct="1">
+      <a:lvl9pPr marL="3886200" indent="-228600" algn="l" defTabSz="914400" rtl="0" eaLnBrk="1" latinLnBrk="0" hangingPunct="1">
         <a:spcBef>
           <a:spcPct val="20000"/>
         </a:spcBef>
-        <a:buFont typeface="Arial"/>
+        <a:buFont typeface="Arial" pitchFamily="34" charset="0"/>
         <a:buChar char="•"/>
         <a:defRPr sz="2000" kern="1200">
           <a:solidFill>
@@ -2985,7 +3275,7 @@
       <a:defPPr>
         <a:defRPr lang="en-US"/>
       </a:defPPr>
-      <a:lvl1pPr marL="0" algn="l" defTabSz="457200" rtl="0" eaLnBrk="1" latinLnBrk="0" hangingPunct="1">
+      <a:lvl1pPr marL="0" algn="l" defTabSz="914400" rtl="0" eaLnBrk="1" latinLnBrk="0" hangingPunct="1">
         <a:defRPr sz="1800" kern="1200">
           <a:solidFill>
             <a:schemeClr val="tx1"/>
@@ -2995,7 +3285,7 @@
           <a:cs typeface="+mn-cs"/>
         </a:defRPr>
       </a:lvl1pPr>
-      <a:lvl2pPr marL="457200" algn="l" defTabSz="457200" rtl="0" eaLnBrk="1" latinLnBrk="0" hangingPunct="1">
+      <a:lvl2pPr marL="457200" algn="l" defTabSz="914400" rtl="0" eaLnBrk="1" latinLnBrk="0" hangingPunct="1">
         <a:defRPr sz="1800" kern="1200">
           <a:solidFill>
             <a:schemeClr val="tx1"/>
@@ -3005,7 +3295,7 @@
           <a:cs typeface="+mn-cs"/>
         </a:defRPr>
       </a:lvl2pPr>
-      <a:lvl3pPr marL="914400" algn="l" defTabSz="457200" rtl="0" eaLnBrk="1" latinLnBrk="0" hangingPunct="1">
+      <a:lvl3pPr marL="914400" algn="l" defTabSz="914400" rtl="0" eaLnBrk="1" latinLnBrk="0" hangingPunct="1">
         <a:defRPr sz="1800" kern="1200">
           <a:solidFill>
             <a:schemeClr val="tx1"/>
@@ -3015,7 +3305,7 @@
           <a:cs typeface="+mn-cs"/>
         </a:defRPr>
       </a:lvl3pPr>
-      <a:lvl4pPr marL="1371600" algn="l" defTabSz="457200" rtl="0" eaLnBrk="1" latinLnBrk="0" hangingPunct="1">
+      <a:lvl4pPr marL="1371600" algn="l" defTabSz="914400" rtl="0" eaLnBrk="1" latinLnBrk="0" hangingPunct="1">
         <a:defRPr sz="1800" kern="1200">
           <a:solidFill>
             <a:schemeClr val="tx1"/>
@@ -3025,7 +3315,7 @@
           <a:cs typeface="+mn-cs"/>
         </a:defRPr>
       </a:lvl4pPr>
-      <a:lvl5pPr marL="1828800" algn="l" defTabSz="457200" rtl="0" eaLnBrk="1" latinLnBrk="0" hangingPunct="1">
+      <a:lvl5pPr marL="1828800" algn="l" defTabSz="914400" rtl="0" eaLnBrk="1" latinLnBrk="0" hangingPunct="1">
         <a:defRPr sz="1800" kern="1200">
           <a:solidFill>
             <a:schemeClr val="tx1"/>
@@ -3035,7 +3325,7 @@
           <a:cs typeface="+mn-cs"/>
         </a:defRPr>
       </a:lvl5pPr>
-      <a:lvl6pPr marL="2286000" algn="l" defTabSz="457200" rtl="0" eaLnBrk="1" latinLnBrk="0" hangingPunct="1">
+      <a:lvl6pPr marL="2286000" algn="l" defTabSz="914400" rtl="0" eaLnBrk="1" latinLnBrk="0" hangingPunct="1">
         <a:defRPr sz="1800" kern="1200">
           <a:solidFill>
             <a:schemeClr val="tx1"/>
@@ -3045,7 +3335,7 @@
           <a:cs typeface="+mn-cs"/>
         </a:defRPr>
       </a:lvl6pPr>
-      <a:lvl7pPr marL="2743200" algn="l" defTabSz="457200" rtl="0" eaLnBrk="1" latinLnBrk="0" hangingPunct="1">
+      <a:lvl7pPr marL="2743200" algn="l" defTabSz="914400" rtl="0" eaLnBrk="1" latinLnBrk="0" hangingPunct="1">
         <a:defRPr sz="1800" kern="1200">
           <a:solidFill>
             <a:schemeClr val="tx1"/>
@@ -3055,7 +3345,7 @@
           <a:cs typeface="+mn-cs"/>
         </a:defRPr>
       </a:lvl7pPr>
-      <a:lvl8pPr marL="3200400" algn="l" defTabSz="457200" rtl="0" eaLnBrk="1" latinLnBrk="0" hangingPunct="1">
+      <a:lvl8pPr marL="3200400" algn="l" defTabSz="914400" rtl="0" eaLnBrk="1" latinLnBrk="0" hangingPunct="1">
         <a:defRPr sz="1800" kern="1200">
           <a:solidFill>
             <a:schemeClr val="tx1"/>
@@ -3065,7 +3355,7 @@
           <a:cs typeface="+mn-cs"/>
         </a:defRPr>
       </a:lvl8pPr>
-      <a:lvl9pPr marL="3657600" algn="l" defTabSz="457200" rtl="0" eaLnBrk="1" latinLnBrk="0" hangingPunct="1">
+      <a:lvl9pPr marL="3657600" algn="l" defTabSz="914400" rtl="0" eaLnBrk="1" latinLnBrk="0" hangingPunct="1">
         <a:defRPr sz="1800" kern="1200">
           <a:solidFill>
             <a:schemeClr val="tx1"/>
@@ -3092,153 +3382,136 @@
       <p:grpSpPr/>
       <p:sp>
         <p:nvSpPr>
-          <p:cNvPr id="2" name="Rectangle 1"/>
-          <p:cNvSpPr/>
-          <p:nvPr/>
+          <p:cNvPr id="2" name="Title 1"/>
+          <p:cNvSpPr>
+            <a:spLocks noGrp="1"/>
+          </p:cNvSpPr>
+          <p:nvPr>
+            <p:ph type="title"/>
+          </p:nvPr>
+        </p:nvSpPr>
+        <p:spPr/>
+        <p:txBody>
+          <a:bodyPr/>
+          <a:lstStyle/>
+          <a:p/>
+        </p:txBody>
+      </p:sp>
+      <p:sp>
+        <p:nvSpPr>
+          <p:cNvPr id="3" name="Content Placeholder 2"/>
+          <p:cNvSpPr>
+            <a:spLocks noGrp="1"/>
+          </p:cNvSpPr>
+          <p:nvPr>
+            <p:ph type="obj" idx="1"/>
+          </p:nvPr>
         </p:nvSpPr>
         <p:spPr>
           <a:xfrm>
-            <a:off x="457200" y="1600201"/>
-            <a:ext cx="8229600" cy="533400"/>
+            <a:off x="457200" y="1600200"/>
+            <a:ext cx="8229600" cy="533370"/>
+          </a:xfrm>
+        </p:spPr>
+        <p:txBody>
+          <a:bodyPr wrap="square">
+            <a:normAutofit lnSpcReduction="10000"/>
+          </a:bodyPr>
+          <a:lstStyle/>
+          <a:p/>
+        </p:txBody>
+      </p:sp>
+      <p:sp>
+        <p:nvSpPr>
+          <p:cNvPr id="4" name="TextBox 3"/>
+          <p:cNvSpPr txBox="1"/>
+          <p:nvPr/>
+        </p:nvSpPr>
+        <p:spPr>
+          <a:xfrm>
+            <a:off x="228600" y="2057400"/>
+            <a:ext cx="8762969" cy="1169517"/>
           </a:xfrm>
           <a:prstGeom prst="rect">
             <a:avLst/>
           </a:prstGeom>
+          <a:noFill/>
         </p:spPr>
-        <p:style>
-          <a:lnRef idx="1">
-            <a:schemeClr val="accent1"/>
-          </a:lnRef>
-          <a:fillRef idx="3">
-            <a:schemeClr val="accent1"/>
-          </a:fillRef>
-          <a:effectRef idx="2">
-            <a:schemeClr val="accent1"/>
-          </a:effectRef>
-          <a:fontRef idx="minor">
-            <a:schemeClr val="lt1"/>
-          </a:fontRef>
-        </p:style>
-        <p:txBody>
-          <a:bodyPr rtlCol="0" anchor="ctr"/>
-          <a:lstStyle/>
-          <a:p>
-            <a:pPr algn="ctr"/>
-          </a:p>
-        </p:txBody>
-      </p:sp>
-      <p:sp>
-        <p:nvSpPr>
-          <p:cNvPr id="3" name="Rectangle 2"/>
-          <p:cNvSpPr/>
+        <p:txBody>
+          <a:bodyPr wrap="square">
+            <a:spAutoFit/>
+          </a:bodyPr>
+          <a:lstStyle/>
+          <a:p>
+            <a:pPr algn="ctr">
+              <a:buNone/>
+            </a:pPr>
+            <a:r>
+              <a:rPr sz="7000" b="1" cap="none"/>
+              <a:t>A Few Children </a:t>
+            </a:r>
+          </a:p>
+        </p:txBody>
+      </p:sp>
+      <p:sp>
+        <p:nvSpPr>
+          <p:cNvPr id="5" name="TextBox 4"/>
+          <p:cNvSpPr txBox="1"/>
           <p:nvPr/>
         </p:nvSpPr>
         <p:spPr>
           <a:xfrm>
-            <a:off x="228600" y="2057400"/>
-            <a:ext cx="8762999" cy="1169551"/>
+            <a:off x="228600" y="3429000"/>
+            <a:ext cx="8762969" cy="1169517"/>
           </a:xfrm>
           <a:prstGeom prst="rect">
             <a:avLst/>
           </a:prstGeom>
+          <a:noFill/>
         </p:spPr>
-        <p:style>
-          <a:lnRef idx="1">
-            <a:schemeClr val="accent1"/>
-          </a:lnRef>
-          <a:fillRef idx="3">
-            <a:schemeClr val="accent1"/>
-          </a:fillRef>
-          <a:effectRef idx="2">
-            <a:schemeClr val="accent1"/>
-          </a:effectRef>
-          <a:fontRef idx="minor">
-            <a:schemeClr val="lt1"/>
-          </a:fontRef>
-        </p:style>
-        <p:txBody>
-          <a:bodyPr rtlCol="0" anchor="ctr"/>
-          <a:lstStyle/>
-          <a:p>
-            <a:r>
-              <a:t>A Few Children</a:t>
-            </a:r>
-          </a:p>
-        </p:txBody>
-      </p:sp>
-      <p:sp>
-        <p:nvSpPr>
-          <p:cNvPr id="4" name="Rectangle 3"/>
-          <p:cNvSpPr/>
+        <p:txBody>
+          <a:bodyPr wrap="square">
+            <a:spAutoFit/>
+          </a:bodyPr>
+          <a:lstStyle/>
+          <a:p>
+            <a:pPr algn="ctr">
+              <a:buNone/>
+            </a:pPr>
+            <a:r>
+              <a:rPr sz="7000" b="1" cap="none"/>
+              <a:t>Sponsored</a:t>
+            </a:r>
+          </a:p>
+        </p:txBody>
+      </p:sp>
+      <p:sp>
+        <p:nvSpPr>
+          <p:cNvPr id="6" name="TextBox 5"/>
+          <p:cNvSpPr txBox="1"/>
           <p:nvPr/>
         </p:nvSpPr>
         <p:spPr>
           <a:xfrm>
-            <a:off x="228600" y="3429000"/>
-            <a:ext cx="8762999" cy="1169551"/>
+            <a:off x="228600" y="4724430"/>
+            <a:ext cx="8762969" cy="1169517"/>
           </a:xfrm>
           <a:prstGeom prst="rect">
             <a:avLst/>
           </a:prstGeom>
+          <a:noFill/>
         </p:spPr>
-        <p:style>
-          <a:lnRef idx="1">
-            <a:schemeClr val="accent1"/>
-          </a:lnRef>
-          <a:fillRef idx="3">
-            <a:schemeClr val="accent1"/>
-          </a:fillRef>
-          <a:effectRef idx="2">
-            <a:schemeClr val="accent1"/>
-          </a:effectRef>
-          <a:fontRef idx="minor">
-            <a:schemeClr val="lt1"/>
-          </a:fontRef>
-        </p:style>
-        <p:txBody>
-          <a:bodyPr rtlCol="0" anchor="ctr"/>
-          <a:lstStyle/>
-          <a:p>
-            <a:r>
-              <a:t>Sponsored</a:t>
-            </a:r>
-          </a:p>
-        </p:txBody>
-      </p:sp>
-      <p:sp>
-        <p:nvSpPr>
-          <p:cNvPr id="5" name="Rectangle 4"/>
-          <p:cNvSpPr/>
-          <p:nvPr/>
-        </p:nvSpPr>
-        <p:spPr>
-          <a:xfrm>
-            <a:off x="228600" y="4724400"/>
-            <a:ext cx="8762999" cy="1169551"/>
-          </a:xfrm>
-          <a:prstGeom prst="rect">
-            <a:avLst/>
-          </a:prstGeom>
-        </p:spPr>
-        <p:style>
-          <a:lnRef idx="1">
-            <a:schemeClr val="accent1"/>
-          </a:lnRef>
-          <a:fillRef idx="3">
-            <a:schemeClr val="accent1"/>
-          </a:fillRef>
-          <a:effectRef idx="2">
-            <a:schemeClr val="accent1"/>
-          </a:effectRef>
-          <a:fontRef idx="minor">
-            <a:schemeClr val="lt1"/>
-          </a:fontRef>
-        </p:style>
-        <p:txBody>
-          <a:bodyPr rtlCol="0" anchor="ctr"/>
-          <a:lstStyle/>
-          <a:p>
-            <a:r>
+        <p:txBody>
+          <a:bodyPr wrap="square">
+            <a:spAutoFit/>
+          </a:bodyPr>
+          <a:lstStyle/>
+          <a:p>
+            <a:pPr algn="ctr">
+              <a:buNone/>
+            </a:pPr>
+            <a:r>
+              <a:rPr sz="7000" b="1" cap="none"/>
               <a:t>By Parish Members</a:t>
             </a:r>
           </a:p>
@@ -3264,153 +3537,136 @@
       <p:grpSpPr/>
       <p:sp>
         <p:nvSpPr>
-          <p:cNvPr id="2" name="Rectangle 1"/>
-          <p:cNvSpPr/>
-          <p:nvPr/>
+          <p:cNvPr id="2" name="Title 1"/>
+          <p:cNvSpPr>
+            <a:spLocks noGrp="1"/>
+          </p:cNvSpPr>
+          <p:nvPr>
+            <p:ph type="title"/>
+          </p:nvPr>
+        </p:nvSpPr>
+        <p:spPr/>
+        <p:txBody>
+          <a:bodyPr/>
+          <a:lstStyle/>
+          <a:p/>
+        </p:txBody>
+      </p:sp>
+      <p:sp>
+        <p:nvSpPr>
+          <p:cNvPr id="3" name="Content Placeholder 2"/>
+          <p:cNvSpPr>
+            <a:spLocks noGrp="1"/>
+          </p:cNvSpPr>
+          <p:nvPr>
+            <p:ph type="obj" idx="1"/>
+          </p:nvPr>
         </p:nvSpPr>
         <p:spPr>
           <a:xfrm>
-            <a:off x="457200" y="1600201"/>
-            <a:ext cx="8229600" cy="533400"/>
+            <a:off x="457200" y="1600200"/>
+            <a:ext cx="8229600" cy="533370"/>
+          </a:xfrm>
+        </p:spPr>
+        <p:txBody>
+          <a:bodyPr wrap="square">
+            <a:normAutofit lnSpcReduction="10000"/>
+          </a:bodyPr>
+          <a:lstStyle/>
+          <a:p/>
+        </p:txBody>
+      </p:sp>
+      <p:sp>
+        <p:nvSpPr>
+          <p:cNvPr id="4" name="TextBox 3"/>
+          <p:cNvSpPr txBox="1"/>
+          <p:nvPr/>
+        </p:nvSpPr>
+        <p:spPr>
+          <a:xfrm>
+            <a:off x="152430" y="2057400"/>
+            <a:ext cx="8762969" cy="938723"/>
           </a:xfrm>
           <a:prstGeom prst="rect">
             <a:avLst/>
           </a:prstGeom>
+          <a:noFill/>
         </p:spPr>
-        <p:style>
-          <a:lnRef idx="1">
-            <a:schemeClr val="accent1"/>
-          </a:lnRef>
-          <a:fillRef idx="3">
-            <a:schemeClr val="accent1"/>
-          </a:fillRef>
-          <a:effectRef idx="2">
-            <a:schemeClr val="accent1"/>
-          </a:effectRef>
-          <a:fontRef idx="minor">
-            <a:schemeClr val="lt1"/>
-          </a:fontRef>
-        </p:style>
-        <p:txBody>
-          <a:bodyPr rtlCol="0" anchor="ctr"/>
-          <a:lstStyle/>
-          <a:p>
-            <a:pPr algn="ctr"/>
-          </a:p>
-        </p:txBody>
-      </p:sp>
-      <p:sp>
-        <p:nvSpPr>
-          <p:cNvPr id="3" name="Rectangle 2"/>
-          <p:cNvSpPr/>
+        <p:txBody>
+          <a:bodyPr wrap="square">
+            <a:spAutoFit/>
+          </a:bodyPr>
+          <a:lstStyle/>
+          <a:p>
+            <a:pPr algn="ctr">
+              <a:buNone/>
+            </a:pPr>
+            <a:r>
+              <a:rPr sz="5500" b="1" cap="none"/>
+              <a:t>A Few Children </a:t>
+            </a:r>
+          </a:p>
+        </p:txBody>
+      </p:sp>
+      <p:sp>
+        <p:nvSpPr>
+          <p:cNvPr id="5" name="TextBox 4"/>
+          <p:cNvSpPr txBox="1"/>
           <p:nvPr/>
         </p:nvSpPr>
         <p:spPr>
           <a:xfrm>
-            <a:off x="152400" y="2057400"/>
-            <a:ext cx="8762999" cy="938719"/>
+            <a:off x="228600" y="3429000"/>
+            <a:ext cx="8762969" cy="938723"/>
           </a:xfrm>
           <a:prstGeom prst="rect">
             <a:avLst/>
           </a:prstGeom>
+          <a:noFill/>
         </p:spPr>
-        <p:style>
-          <a:lnRef idx="1">
-            <a:schemeClr val="accent1"/>
-          </a:lnRef>
-          <a:fillRef idx="3">
-            <a:schemeClr val="accent1"/>
-          </a:fillRef>
-          <a:effectRef idx="2">
-            <a:schemeClr val="accent1"/>
-          </a:effectRef>
-          <a:fontRef idx="minor">
-            <a:schemeClr val="lt1"/>
-          </a:fontRef>
-        </p:style>
-        <p:txBody>
-          <a:bodyPr rtlCol="0" anchor="ctr"/>
-          <a:lstStyle/>
-          <a:p>
-            <a:r>
-              <a:t>A Few Children</a:t>
-            </a:r>
-          </a:p>
-        </p:txBody>
-      </p:sp>
-      <p:sp>
-        <p:nvSpPr>
-          <p:cNvPr id="4" name="Rectangle 3"/>
-          <p:cNvSpPr/>
+        <p:txBody>
+          <a:bodyPr wrap="square">
+            <a:spAutoFit/>
+          </a:bodyPr>
+          <a:lstStyle/>
+          <a:p>
+            <a:pPr algn="ctr">
+              <a:buNone/>
+            </a:pPr>
+            <a:r>
+              <a:rPr sz="5500" b="1" cap="none"/>
+              <a:t>Sponsored</a:t>
+            </a:r>
+          </a:p>
+        </p:txBody>
+      </p:sp>
+      <p:sp>
+        <p:nvSpPr>
+          <p:cNvPr id="6" name="TextBox 5"/>
+          <p:cNvSpPr txBox="1"/>
           <p:nvPr/>
         </p:nvSpPr>
         <p:spPr>
           <a:xfrm>
-            <a:off x="228600" y="3429000"/>
-            <a:ext cx="8762999" cy="938719"/>
+            <a:off x="228600" y="4724430"/>
+            <a:ext cx="8762969" cy="938723"/>
           </a:xfrm>
           <a:prstGeom prst="rect">
             <a:avLst/>
           </a:prstGeom>
+          <a:noFill/>
         </p:spPr>
-        <p:style>
-          <a:lnRef idx="1">
-            <a:schemeClr val="accent1"/>
-          </a:lnRef>
-          <a:fillRef idx="3">
-            <a:schemeClr val="accent1"/>
-          </a:fillRef>
-          <a:effectRef idx="2">
-            <a:schemeClr val="accent1"/>
-          </a:effectRef>
-          <a:fontRef idx="minor">
-            <a:schemeClr val="lt1"/>
-          </a:fontRef>
-        </p:style>
-        <p:txBody>
-          <a:bodyPr rtlCol="0" anchor="ctr"/>
-          <a:lstStyle/>
-          <a:p>
-            <a:r>
-              <a:t>Sponsored</a:t>
-            </a:r>
-          </a:p>
-        </p:txBody>
-      </p:sp>
-      <p:sp>
-        <p:nvSpPr>
-          <p:cNvPr id="5" name="Rectangle 4"/>
-          <p:cNvSpPr/>
-          <p:nvPr/>
-        </p:nvSpPr>
-        <p:spPr>
-          <a:xfrm>
-            <a:off x="228600" y="4724400"/>
-            <a:ext cx="8762999" cy="938719"/>
-          </a:xfrm>
-          <a:prstGeom prst="rect">
-            <a:avLst/>
-          </a:prstGeom>
-        </p:spPr>
-        <p:style>
-          <a:lnRef idx="1">
-            <a:schemeClr val="accent1"/>
-          </a:lnRef>
-          <a:fillRef idx="3">
-            <a:schemeClr val="accent1"/>
-          </a:fillRef>
-          <a:effectRef idx="2">
-            <a:schemeClr val="accent1"/>
-          </a:effectRef>
-          <a:fontRef idx="minor">
-            <a:schemeClr val="lt1"/>
-          </a:fontRef>
-        </p:style>
-        <p:txBody>
-          <a:bodyPr rtlCol="0" anchor="ctr"/>
-          <a:lstStyle/>
-          <a:p>
-            <a:r>
+        <p:txBody>
+          <a:bodyPr wrap="square">
+            <a:spAutoFit/>
+          </a:bodyPr>
+          <a:lstStyle/>
+          <a:p>
+            <a:pPr algn="ctr">
+              <a:buNone/>
+            </a:pPr>
+            <a:r>
+              <a:rPr sz="5500" b="1" cap="none"/>
               <a:t>By Parish Members</a:t>
             </a:r>
           </a:p>
@@ -3436,153 +3692,158 @@
       <p:grpSpPr/>
       <p:sp>
         <p:nvSpPr>
-          <p:cNvPr id="2" name="Rectangle 1"/>
-          <p:cNvSpPr/>
-          <p:nvPr/>
+          <p:cNvPr id="2" name="Title 1"/>
+          <p:cNvSpPr>
+            <a:spLocks noGrp="1"/>
+          </p:cNvSpPr>
+          <p:nvPr>
+            <p:ph type="title"/>
+          </p:nvPr>
+        </p:nvSpPr>
+        <p:spPr/>
+        <p:txBody>
+          <a:bodyPr/>
+          <a:lstStyle/>
+          <a:p/>
+        </p:txBody>
+      </p:sp>
+      <p:sp>
+        <p:nvSpPr>
+          <p:cNvPr id="3" name="Content Placeholder 2"/>
+          <p:cNvSpPr>
+            <a:spLocks noGrp="1"/>
+          </p:cNvSpPr>
+          <p:nvPr>
+            <p:ph type="obj" idx="1"/>
+          </p:nvPr>
         </p:nvSpPr>
         <p:spPr>
           <a:xfrm>
-            <a:off x="457200" y="1600201"/>
-            <a:ext cx="8229600" cy="533400"/>
+            <a:off x="457200" y="1600200"/>
+            <a:ext cx="8229600" cy="533370"/>
+          </a:xfrm>
+        </p:spPr>
+        <p:txBody>
+          <a:bodyPr wrap="square">
+            <a:normAutofit lnSpcReduction="10000"/>
+          </a:bodyPr>
+          <a:lstStyle/>
+          <a:p/>
+        </p:txBody>
+      </p:sp>
+      <p:sp>
+        <p:nvSpPr>
+          <p:cNvPr id="4" name="TextBox 3"/>
+          <p:cNvSpPr txBox="1"/>
+          <p:nvPr/>
+        </p:nvSpPr>
+        <p:spPr>
+          <a:xfrm>
+            <a:off x="228600" y="2438430"/>
+            <a:ext cx="8762969" cy="938723"/>
           </a:xfrm>
           <a:prstGeom prst="rect">
             <a:avLst/>
           </a:prstGeom>
+          <a:noFill/>
         </p:spPr>
-        <p:style>
-          <a:lnRef idx="1">
-            <a:schemeClr val="accent1"/>
-          </a:lnRef>
-          <a:fillRef idx="3">
-            <a:schemeClr val="accent1"/>
-          </a:fillRef>
-          <a:effectRef idx="2">
-            <a:schemeClr val="accent1"/>
-          </a:effectRef>
-          <a:fontRef idx="minor">
-            <a:schemeClr val="lt1"/>
-          </a:fontRef>
-        </p:style>
-        <p:txBody>
-          <a:bodyPr rtlCol="0" anchor="ctr"/>
-          <a:lstStyle/>
-          <a:p>
-            <a:pPr algn="ctr"/>
-          </a:p>
-        </p:txBody>
-      </p:sp>
-      <p:sp>
-        <p:nvSpPr>
-          <p:cNvPr id="3" name="Rectangle 2"/>
-          <p:cNvSpPr/>
+        <p:txBody>
+          <a:bodyPr wrap="square">
+            <a:spAutoFit/>
+          </a:bodyPr>
+          <a:lstStyle/>
+          <a:p>
+            <a:pPr algn="ctr">
+              <a:buNone/>
+            </a:pPr>
+            <a:r>
+              <a:rPr sz="5500" b="1" cap="none">
+                <a:solidFill>
+                  <a:srgbClr val="00B050"/>
+                  <a:srgbClr val="00B050"/>
+                </a:solidFill>
+              </a:rPr>
+              <a:t>A Brief Look at Poverty </a:t>
+            </a:r>
+          </a:p>
+        </p:txBody>
+      </p:sp>
+      <p:sp>
+        <p:nvSpPr>
+          <p:cNvPr id="5" name="TextBox 4"/>
+          <p:cNvSpPr txBox="1"/>
           <p:nvPr/>
         </p:nvSpPr>
         <p:spPr>
           <a:xfrm>
-            <a:off x="228600" y="2438400"/>
-            <a:ext cx="8762999" cy="938719"/>
+            <a:off x="152430" y="3657600"/>
+            <a:ext cx="8762969" cy="1169517"/>
           </a:xfrm>
           <a:prstGeom prst="rect">
             <a:avLst/>
           </a:prstGeom>
+          <a:noFill/>
         </p:spPr>
-        <p:style>
-          <a:lnRef idx="1">
-            <a:schemeClr val="accent1"/>
-          </a:lnRef>
-          <a:fillRef idx="3">
-            <a:schemeClr val="accent1"/>
-          </a:fillRef>
-          <a:effectRef idx="2">
-            <a:schemeClr val="accent1"/>
-          </a:effectRef>
-          <a:fontRef idx="minor">
-            <a:schemeClr val="lt1"/>
-          </a:fontRef>
-        </p:style>
-        <p:txBody>
-          <a:bodyPr rtlCol="0" anchor="ctr"/>
-          <a:lstStyle/>
-          <a:p>
-            <a:r>
-              <a:t>A Brief Look at Poverty</a:t>
-            </a:r>
-          </a:p>
-        </p:txBody>
-      </p:sp>
-      <p:sp>
-        <p:nvSpPr>
-          <p:cNvPr id="4" name="Rectangle 3"/>
-          <p:cNvSpPr/>
+        <p:txBody>
+          <a:bodyPr wrap="square">
+            <a:spAutoFit/>
+          </a:bodyPr>
+          <a:lstStyle/>
+          <a:p>
+            <a:pPr lvl="0" algn="ctr">
+              <a:buNone/>
+            </a:pPr>
+            <a:r>
+              <a:rPr sz="7000" b="1" cap="none">
+                <a:solidFill>
+                  <a:srgbClr val="00B050"/>
+                </a:solidFill>
+              </a:rPr>
+              <a:t>at Poverty</a:t>
+            </a:r>
+            <a:r>
+              <a:rPr sz="5500" b="1" cap="none">
+                <a:solidFill>
+                  <a:srgbClr val="00B050"/>
+                </a:solidFill>
+              </a:rPr>
+              <a:t> </a:t>
+            </a:r>
+          </a:p>
+        </p:txBody>
+      </p:sp>
+      <p:sp>
+        <p:nvSpPr>
+          <p:cNvPr id="6" name="TextBox 5"/>
+          <p:cNvSpPr txBox="1"/>
           <p:nvPr/>
         </p:nvSpPr>
         <p:spPr>
           <a:xfrm>
-            <a:off x="152400" y="3657600"/>
-            <a:ext cx="8762999" cy="1169551"/>
+            <a:off x="152430" y="5105369"/>
+            <a:ext cx="8762969" cy="1169517"/>
           </a:xfrm>
           <a:prstGeom prst="rect">
             <a:avLst/>
           </a:prstGeom>
+          <a:noFill/>
         </p:spPr>
-        <p:style>
-          <a:lnRef idx="1">
-            <a:schemeClr val="accent1"/>
-          </a:lnRef>
-          <a:fillRef idx="3">
-            <a:schemeClr val="accent1"/>
-          </a:fillRef>
-          <a:effectRef idx="2">
-            <a:schemeClr val="accent1"/>
-          </a:effectRef>
-          <a:fontRef idx="minor">
-            <a:schemeClr val="lt1"/>
-          </a:fontRef>
-        </p:style>
-        <p:txBody>
-          <a:bodyPr rtlCol="0" anchor="ctr"/>
-          <a:lstStyle/>
-          <a:p>
-            <a:r>
-              <a:t>at Poverty</a:t>
-            </a:r>
-          </a:p>
-        </p:txBody>
-      </p:sp>
-      <p:sp>
-        <p:nvSpPr>
-          <p:cNvPr id="5" name="Rectangle 4"/>
-          <p:cNvSpPr/>
-          <p:nvPr/>
-        </p:nvSpPr>
-        <p:spPr>
-          <a:xfrm>
-            <a:off x="152400" y="5105400"/>
-            <a:ext cx="8762999" cy="1169551"/>
-          </a:xfrm>
-          <a:prstGeom prst="rect">
-            <a:avLst/>
-          </a:prstGeom>
-        </p:spPr>
-        <p:style>
-          <a:lnRef idx="1">
-            <a:schemeClr val="accent1"/>
-          </a:lnRef>
-          <a:fillRef idx="3">
-            <a:schemeClr val="accent1"/>
-          </a:fillRef>
-          <a:effectRef idx="2">
-            <a:schemeClr val="accent1"/>
-          </a:effectRef>
-          <a:fontRef idx="minor">
-            <a:schemeClr val="lt1"/>
-          </a:fontRef>
-        </p:style>
-        <p:txBody>
-          <a:bodyPr rtlCol="0" anchor="ctr"/>
-          <a:lstStyle/>
-          <a:p>
-            <a:r>
+        <p:txBody>
+          <a:bodyPr wrap="square">
+            <a:spAutoFit/>
+          </a:bodyPr>
+          <a:lstStyle/>
+          <a:p>
+            <a:pPr algn="ctr">
+              <a:buNone/>
+            </a:pPr>
+            <a:r>
+              <a:rPr sz="7000" b="1" cap="none">
+                <a:solidFill>
+                  <a:srgbClr val="00B050"/>
+                  <a:srgbClr val="00B050"/>
+                </a:solidFill>
+              </a:rPr>
               <a:t>A Brief Look</a:t>
             </a:r>
           </a:p>
@@ -3671,7 +3932,6 @@
         <a:font script="Mong" typeface="Mongolian Baiti"/>
         <a:font script="Viet" typeface="Times New Roman"/>
         <a:font script="Uigh" typeface="Microsoft Uighur"/>
-        <a:font script="Geor" typeface="Sylfaen"/>
       </a:majorFont>
       <a:minorFont>
         <a:latin typeface="Calibri"/>
@@ -3706,7 +3966,6 @@
         <a:font script="Mong" typeface="Mongolian Baiti"/>
         <a:font script="Viet" typeface="Arial"/>
         <a:font script="Uigh" typeface="Microsoft Uighur"/>
-        <a:font script="Geor" typeface="Sylfaen"/>
       </a:minorFont>
     </a:fontScheme>
     <a:fmtScheme name="Office">
@@ -3741,16 +4000,20 @@
           <a:gsLst>
             <a:gs pos="0">
               <a:schemeClr val="phClr">
-                <a:tint val="100000"/>
-                <a:shade val="100000"/>
+                <a:shade val="51000"/>
+                <a:satMod val="130000"/>
+              </a:schemeClr>
+            </a:gs>
+            <a:gs pos="80000">
+              <a:schemeClr val="phClr">
+                <a:shade val="93000"/>
                 <a:satMod val="130000"/>
               </a:schemeClr>
             </a:gs>
             <a:gs pos="100000">
               <a:schemeClr val="phClr">
-                <a:tint val="50000"/>
-                <a:shade val="100000"/>
-                <a:satMod val="350000"/>
+                <a:shade val="94000"/>
+                <a:satMod val="135000"/>
               </a:schemeClr>
             </a:gs>
           </a:gsLst>
@@ -3872,46 +4135,290 @@
       </a:bgFillStyleLst>
     </a:fmtScheme>
   </a:themeElements>
-  <a:objectDefaults>
-    <a:spDef>
-      <a:spPr/>
-      <a:bodyPr/>
-      <a:lstStyle/>
-      <a:style>
-        <a:lnRef idx="1">
-          <a:schemeClr val="accent1"/>
-        </a:lnRef>
-        <a:fillRef idx="3">
-          <a:schemeClr val="accent1"/>
-        </a:fillRef>
-        <a:effectRef idx="2">
-          <a:schemeClr val="accent1"/>
-        </a:effectRef>
-        <a:fontRef idx="minor">
-          <a:schemeClr val="lt1"/>
-        </a:fontRef>
-      </a:style>
-    </a:spDef>
-    <a:lnDef>
-      <a:spPr/>
-      <a:bodyPr/>
-      <a:lstStyle/>
-      <a:style>
-        <a:lnRef idx="2">
-          <a:schemeClr val="accent1"/>
-        </a:lnRef>
-        <a:fillRef idx="0">
-          <a:schemeClr val="accent1"/>
-        </a:fillRef>
-        <a:effectRef idx="1">
-          <a:schemeClr val="accent1"/>
-        </a:effectRef>
-        <a:fontRef idx="minor">
-          <a:schemeClr val="tx1"/>
-        </a:fontRef>
-      </a:style>
-    </a:lnDef>
-  </a:objectDefaults>
+  <a:objectDefaults/>
+  <a:extraClrSchemeLst/>
+</a:theme>
+</file>
+
+<file path=ppt/theme/theme2.xml><?xml version="1.0" encoding="utf-8"?>
+<a:theme xmlns:a="http://schemas.openxmlformats.org/drawingml/2006/main" name="Office Theme">
+  <a:themeElements>
+    <a:clrScheme name="Office">
+      <a:dk1>
+        <a:sysClr val="windowText" lastClr="000000"/>
+      </a:dk1>
+      <a:lt1>
+        <a:sysClr val="window" lastClr="FFFFFF"/>
+      </a:lt1>
+      <a:dk2>
+        <a:srgbClr val="1F497D"/>
+      </a:dk2>
+      <a:lt2>
+        <a:srgbClr val="EEECE1"/>
+      </a:lt2>
+      <a:accent1>
+        <a:srgbClr val="4F81BD"/>
+      </a:accent1>
+      <a:accent2>
+        <a:srgbClr val="C0504D"/>
+      </a:accent2>
+      <a:accent3>
+        <a:srgbClr val="9BBB59"/>
+      </a:accent3>
+      <a:accent4>
+        <a:srgbClr val="8064A2"/>
+      </a:accent4>
+      <a:accent5>
+        <a:srgbClr val="4BACC6"/>
+      </a:accent5>
+      <a:accent6>
+        <a:srgbClr val="F79646"/>
+      </a:accent6>
+      <a:hlink>
+        <a:srgbClr val="0000FF"/>
+      </a:hlink>
+      <a:folHlink>
+        <a:srgbClr val="800080"/>
+      </a:folHlink>
+    </a:clrScheme>
+    <a:fontScheme name="Office">
+      <a:majorFont>
+        <a:latin typeface="Calibri"/>
+        <a:ea typeface=""/>
+        <a:cs typeface=""/>
+        <a:font script="Jpan" typeface="ＭＳ Ｐゴシック"/>
+        <a:font script="Hang" typeface="맑은 고딕"/>
+        <a:font script="Hans" typeface="宋体"/>
+        <a:font script="Hant" typeface="新細明體"/>
+        <a:font script="Arab" typeface="Times New Roman"/>
+        <a:font script="Hebr" typeface="Times New Roman"/>
+        <a:font script="Thai" typeface="Angsana New"/>
+        <a:font script="Ethi" typeface="Nyala"/>
+        <a:font script="Beng" typeface="Vrinda"/>
+        <a:font script="Gujr" typeface="Shruti"/>
+        <a:font script="Khmr" typeface="MoolBoran"/>
+        <a:font script="Knda" typeface="Tunga"/>
+        <a:font script="Guru" typeface="Raavi"/>
+        <a:font script="Cans" typeface="Euphemia"/>
+        <a:font script="Cher" typeface="Plantagenet Cherokee"/>
+        <a:font script="Yiii" typeface="Microsoft Yi Baiti"/>
+        <a:font script="Tibt" typeface="Microsoft Himalaya"/>
+        <a:font script="Thaa" typeface="MV Boli"/>
+        <a:font script="Deva" typeface="Mangal"/>
+        <a:font script="Telu" typeface="Gautami"/>
+        <a:font script="Taml" typeface="Latha"/>
+        <a:font script="Syrc" typeface="Estrangelo Edessa"/>
+        <a:font script="Orya" typeface="Kalinga"/>
+        <a:font script="Mlym" typeface="Kartika"/>
+        <a:font script="Laoo" typeface="DokChampa"/>
+        <a:font script="Sinh" typeface="Iskoola Pota"/>
+        <a:font script="Mong" typeface="Mongolian Baiti"/>
+        <a:font script="Viet" typeface="Times New Roman"/>
+        <a:font script="Uigh" typeface="Microsoft Uighur"/>
+      </a:majorFont>
+      <a:minorFont>
+        <a:latin typeface="Calibri"/>
+        <a:ea typeface=""/>
+        <a:cs typeface=""/>
+        <a:font script="Jpan" typeface="ＭＳ Ｐゴシック"/>
+        <a:font script="Hang" typeface="맑은 고딕"/>
+        <a:font script="Hans" typeface="宋体"/>
+        <a:font script="Hant" typeface="新細明體"/>
+        <a:font script="Arab" typeface="Arial"/>
+        <a:font script="Hebr" typeface="Arial"/>
+        <a:font script="Thai" typeface="Cordia New"/>
+        <a:font script="Ethi" typeface="Nyala"/>
+        <a:font script="Beng" typeface="Vrinda"/>
+        <a:font script="Gujr" typeface="Shruti"/>
+        <a:font script="Khmr" typeface="DaunPenh"/>
+        <a:font script="Knda" typeface="Tunga"/>
+        <a:font script="Guru" typeface="Raavi"/>
+        <a:font script="Cans" typeface="Euphemia"/>
+        <a:font script="Cher" typeface="Plantagenet Cherokee"/>
+        <a:font script="Yiii" typeface="Microsoft Yi Baiti"/>
+        <a:font script="Tibt" typeface="Microsoft Himalaya"/>
+        <a:font script="Thaa" typeface="MV Boli"/>
+        <a:font script="Deva" typeface="Mangal"/>
+        <a:font script="Telu" typeface="Gautami"/>
+        <a:font script="Taml" typeface="Latha"/>
+        <a:font script="Syrc" typeface="Estrangelo Edessa"/>
+        <a:font script="Orya" typeface="Kalinga"/>
+        <a:font script="Mlym" typeface="Kartika"/>
+        <a:font script="Laoo" typeface="DokChampa"/>
+        <a:font script="Sinh" typeface="Iskoola Pota"/>
+        <a:font script="Mong" typeface="Mongolian Baiti"/>
+        <a:font script="Viet" typeface="Arial"/>
+        <a:font script="Uigh" typeface="Microsoft Uighur"/>
+      </a:minorFont>
+    </a:fontScheme>
+    <a:fmtScheme name="Office">
+      <a:fillStyleLst>
+        <a:solidFill>
+          <a:schemeClr val="phClr"/>
+        </a:solidFill>
+        <a:gradFill rotWithShape="1">
+          <a:gsLst>
+            <a:gs pos="0">
+              <a:schemeClr val="phClr">
+                <a:tint val="50000"/>
+                <a:satMod val="300000"/>
+              </a:schemeClr>
+            </a:gs>
+            <a:gs pos="35000">
+              <a:schemeClr val="phClr">
+                <a:tint val="37000"/>
+                <a:satMod val="300000"/>
+              </a:schemeClr>
+            </a:gs>
+            <a:gs pos="100000">
+              <a:schemeClr val="phClr">
+                <a:tint val="15000"/>
+                <a:satMod val="350000"/>
+              </a:schemeClr>
+            </a:gs>
+          </a:gsLst>
+          <a:lin ang="16200000" scaled="1"/>
+        </a:gradFill>
+        <a:gradFill rotWithShape="1">
+          <a:gsLst>
+            <a:gs pos="0">
+              <a:schemeClr val="phClr">
+                <a:shade val="51000"/>
+                <a:satMod val="130000"/>
+              </a:schemeClr>
+            </a:gs>
+            <a:gs pos="80000">
+              <a:schemeClr val="phClr">
+                <a:shade val="93000"/>
+                <a:satMod val="130000"/>
+              </a:schemeClr>
+            </a:gs>
+            <a:gs pos="100000">
+              <a:schemeClr val="phClr">
+                <a:shade val="94000"/>
+                <a:satMod val="135000"/>
+              </a:schemeClr>
+            </a:gs>
+          </a:gsLst>
+          <a:lin ang="16200000" scaled="0"/>
+        </a:gradFill>
+      </a:fillStyleLst>
+      <a:lnStyleLst>
+        <a:ln w="9525" cap="flat" cmpd="sng" algn="ctr">
+          <a:solidFill>
+            <a:schemeClr val="phClr">
+              <a:shade val="95000"/>
+              <a:satMod val="105000"/>
+            </a:schemeClr>
+          </a:solidFill>
+          <a:prstDash val="solid"/>
+        </a:ln>
+        <a:ln w="25400" cap="flat" cmpd="sng" algn="ctr">
+          <a:solidFill>
+            <a:schemeClr val="phClr"/>
+          </a:solidFill>
+          <a:prstDash val="solid"/>
+        </a:ln>
+        <a:ln w="38100" cap="flat" cmpd="sng" algn="ctr">
+          <a:solidFill>
+            <a:schemeClr val="phClr"/>
+          </a:solidFill>
+          <a:prstDash val="solid"/>
+        </a:ln>
+      </a:lnStyleLst>
+      <a:effectStyleLst>
+        <a:effectStyle>
+          <a:effectLst>
+            <a:outerShdw blurRad="40000" dist="20000" dir="5400000" rotWithShape="0">
+              <a:srgbClr val="000000">
+                <a:alpha val="38000"/>
+              </a:srgbClr>
+            </a:outerShdw>
+          </a:effectLst>
+        </a:effectStyle>
+        <a:effectStyle>
+          <a:effectLst>
+            <a:outerShdw blurRad="40000" dist="23000" dir="5400000" rotWithShape="0">
+              <a:srgbClr val="000000">
+                <a:alpha val="35000"/>
+              </a:srgbClr>
+            </a:outerShdw>
+          </a:effectLst>
+        </a:effectStyle>
+        <a:effectStyle>
+          <a:effectLst>
+            <a:outerShdw blurRad="40000" dist="23000" dir="5400000" rotWithShape="0">
+              <a:srgbClr val="000000">
+                <a:alpha val="35000"/>
+              </a:srgbClr>
+            </a:outerShdw>
+          </a:effectLst>
+          <a:scene3d>
+            <a:camera prst="orthographicFront">
+              <a:rot lat="0" lon="0" rev="0"/>
+            </a:camera>
+            <a:lightRig rig="threePt" dir="t">
+              <a:rot lat="0" lon="0" rev="1200000"/>
+            </a:lightRig>
+          </a:scene3d>
+          <a:sp3d>
+            <a:bevelT w="63500" h="25400"/>
+          </a:sp3d>
+        </a:effectStyle>
+      </a:effectStyleLst>
+      <a:bgFillStyleLst>
+        <a:solidFill>
+          <a:schemeClr val="phClr"/>
+        </a:solidFill>
+        <a:gradFill rotWithShape="1">
+          <a:gsLst>
+            <a:gs pos="0">
+              <a:schemeClr val="phClr">
+                <a:tint val="40000"/>
+                <a:satMod val="350000"/>
+              </a:schemeClr>
+            </a:gs>
+            <a:gs pos="40000">
+              <a:schemeClr val="phClr">
+                <a:tint val="45000"/>
+                <a:shade val="99000"/>
+                <a:satMod val="350000"/>
+              </a:schemeClr>
+            </a:gs>
+            <a:gs pos="100000">
+              <a:schemeClr val="phClr">
+                <a:shade val="20000"/>
+                <a:satMod val="255000"/>
+              </a:schemeClr>
+            </a:gs>
+          </a:gsLst>
+          <a:path path="circle">
+            <a:fillToRect l="50000" t="-80000" r="50000" b="180000"/>
+          </a:path>
+        </a:gradFill>
+        <a:gradFill rotWithShape="1">
+          <a:gsLst>
+            <a:gs pos="0">
+              <a:schemeClr val="phClr">
+                <a:tint val="80000"/>
+                <a:satMod val="300000"/>
+              </a:schemeClr>
+            </a:gs>
+            <a:gs pos="100000">
+              <a:schemeClr val="phClr">
+                <a:shade val="30000"/>
+                <a:satMod val="200000"/>
+              </a:schemeClr>
+            </a:gs>
+          </a:gsLst>
+          <a:path path="circle">
+            <a:fillToRect l="50000" t="50000" r="50000" b="50000"/>
+          </a:path>
+        </a:gradFill>
+      </a:bgFillStyleLst>
+    </a:fmtScheme>
+  </a:themeElements>
+  <a:objectDefaults/>
   <a:extraClrSchemeLst/>
 </a:theme>
 </file>